--- a/Cource_LAB_Create a Create a Docker on Ubuntu 20.04.pptx
+++ b/Cource_LAB_Create a Create a Docker on Ubuntu 20.04.pptx
@@ -5,7 +5,7 @@
     <p:sldMasterId id="2147483735" r:id="rId1"/>
   </p:sldMasterIdLst>
   <p:notesMasterIdLst>
-    <p:notesMasterId r:id="rId20"/>
+    <p:notesMasterId r:id="rId21"/>
   </p:notesMasterIdLst>
   <p:sldIdLst>
     <p:sldId id="270" r:id="rId2"/>
@@ -25,7 +25,8 @@
     <p:sldId id="301" r:id="rId16"/>
     <p:sldId id="303" r:id="rId17"/>
     <p:sldId id="304" r:id="rId18"/>
-    <p:sldId id="271" r:id="rId19"/>
+    <p:sldId id="305" r:id="rId19"/>
+    <p:sldId id="271" r:id="rId20"/>
   </p:sldIdLst>
   <p:sldSz cx="12192000" cy="6858000"/>
   <p:notesSz cx="6858000" cy="9144000"/>
@@ -1205,6 +1206,112 @@
     <p:extLst>
       <p:ext uri="{BB962C8B-B14F-4D97-AF65-F5344CB8AC3E}">
         <p14:creationId xmlns:p14="http://schemas.microsoft.com/office/powerpoint/2010/main" val="2479059854"/>
+      </p:ext>
+    </p:extLst>
+  </p:cSld>
+  <p:clrMapOvr>
+    <a:masterClrMapping/>
+  </p:clrMapOvr>
+</p:notes>
+</file>
+
+<file path=ppt/notesSlides/notesSlide9.xml><?xml version="1.0" encoding="utf-8"?>
+<p:notes xmlns:a="http://schemas.openxmlformats.org/drawingml/2006/main" xmlns:r="http://schemas.openxmlformats.org/officeDocument/2006/relationships" xmlns:p="http://schemas.openxmlformats.org/presentationml/2006/main">
+  <p:cSld>
+    <p:spTree>
+      <p:nvGrpSpPr>
+        <p:cNvPr id="1" name=""/>
+        <p:cNvGrpSpPr/>
+        <p:nvPr/>
+      </p:nvGrpSpPr>
+      <p:grpSpPr>
+        <a:xfrm>
+          <a:off x="0" y="0"/>
+          <a:ext cx="0" cy="0"/>
+          <a:chOff x="0" y="0"/>
+          <a:chExt cx="0" cy="0"/>
+        </a:xfrm>
+      </p:grpSpPr>
+      <p:sp>
+        <p:nvSpPr>
+          <p:cNvPr id="2" name="Slide Image Placeholder 1"/>
+          <p:cNvSpPr>
+            <a:spLocks noGrp="1" noRot="1" noChangeAspect="1"/>
+          </p:cNvSpPr>
+          <p:nvPr>
+            <p:ph type="sldImg"/>
+          </p:nvPr>
+        </p:nvSpPr>
+        <p:spPr/>
+      </p:sp>
+      <p:sp>
+        <p:nvSpPr>
+          <p:cNvPr id="3" name="Notes Placeholder 2"/>
+          <p:cNvSpPr>
+            <a:spLocks noGrp="1"/>
+          </p:cNvSpPr>
+          <p:nvPr>
+            <p:ph type="body" idx="1"/>
+          </p:nvPr>
+        </p:nvSpPr>
+        <p:spPr/>
+        <p:txBody>
+          <a:bodyPr/>
+          <a:lstStyle/>
+          <a:p>
+            <a:r>
+              <a:rPr lang="en-US" dirty="0" smtClean="0"/>
+              <a:t>https://hub.docker.com/r/cschranz/gpu-jupyter</a:t>
+            </a:r>
+          </a:p>
+          <a:p>
+            <a:r>
+              <a:rPr lang="en-US" dirty="0" smtClean="0"/>
+              <a:t>https://github.com/iot-salzburg/reproducible-research-with-gpu-jupyter</a:t>
+            </a:r>
+          </a:p>
+          <a:p>
+            <a:r>
+              <a:rPr lang="en-US" dirty="0" smtClean="0"/>
+              <a:t>https://docs.nvidia.com/datacenter/cloud-native/container-toolkit/latest/install-guide.html</a:t>
+            </a:r>
+          </a:p>
+          <a:p>
+            <a:r>
+              <a:rPr lang="en-US" dirty="0" smtClean="0"/>
+              <a:t>https://github.com/mmartial/ComfyUI-Nvidia-Docker</a:t>
+            </a:r>
+            <a:endParaRPr lang="en-US" dirty="0"/>
+          </a:p>
+        </p:txBody>
+      </p:sp>
+      <p:sp>
+        <p:nvSpPr>
+          <p:cNvPr id="4" name="Slide Number Placeholder 3"/>
+          <p:cNvSpPr>
+            <a:spLocks noGrp="1"/>
+          </p:cNvSpPr>
+          <p:nvPr>
+            <p:ph type="sldNum" sz="quarter" idx="10"/>
+          </p:nvPr>
+        </p:nvSpPr>
+        <p:spPr/>
+        <p:txBody>
+          <a:bodyPr/>
+          <a:lstStyle/>
+          <a:p>
+            <a:fld id="{8AEEB89B-E730-41A0-81AF-DAEB457925DE}" type="slidenum">
+              <a:rPr lang="en-US" smtClean="0"/>
+              <a:t>18</a:t>
+            </a:fld>
+            <a:endParaRPr lang="en-US"/>
+          </a:p>
+        </p:txBody>
+      </p:sp>
+    </p:spTree>
+    <p:extLst>
+      <p:ext uri="{BB962C8B-B14F-4D97-AF65-F5344CB8AC3E}">
+        <p14:creationId xmlns:p14="http://schemas.microsoft.com/office/powerpoint/2010/main" val="3538893245"/>
       </p:ext>
     </p:extLst>
   </p:cSld>
@@ -15486,6 +15593,353 @@
             <p:ph type="title"/>
           </p:nvPr>
         </p:nvSpPr>
+        <p:spPr>
+          <a:xfrm>
+            <a:off x="1163276" y="519182"/>
+            <a:ext cx="1888068" cy="1116355"/>
+          </a:xfrm>
+        </p:spPr>
+        <p:txBody>
+          <a:bodyPr>
+            <a:normAutofit/>
+          </a:bodyPr>
+          <a:lstStyle/>
+          <a:p>
+            <a:pPr algn="just"/>
+            <a:r>
+              <a:rPr lang="en-US" b="1" dirty="0" smtClean="0">
+                <a:solidFill>
+                  <a:srgbClr val="002060"/>
+                </a:solidFill>
+              </a:rPr>
+              <a:t>Image</a:t>
+            </a:r>
+            <a:endParaRPr lang="en-US" sz="2000" b="1" dirty="0">
+              <a:solidFill>
+                <a:srgbClr val="002060"/>
+              </a:solidFill>
+            </a:endParaRPr>
+          </a:p>
+        </p:txBody>
+      </p:sp>
+      <p:sp>
+        <p:nvSpPr>
+          <p:cNvPr id="7" name="Rectangle 6"/>
+          <p:cNvSpPr/>
+          <p:nvPr/>
+        </p:nvSpPr>
+        <p:spPr>
+          <a:xfrm>
+            <a:off x="0" y="61696"/>
+            <a:ext cx="2363980" cy="1015663"/>
+          </a:xfrm>
+          <a:prstGeom prst="rect">
+            <a:avLst/>
+          </a:prstGeom>
+        </p:spPr>
+        <p:txBody>
+          <a:bodyPr wrap="none">
+            <a:spAutoFit/>
+          </a:bodyPr>
+          <a:lstStyle/>
+          <a:p>
+            <a:r>
+              <a:rPr lang="en-US" sz="6000" dirty="0">
+                <a:solidFill>
+                  <a:srgbClr val="FFC000"/>
+                </a:solidFill>
+              </a:rPr>
+              <a:t>Docker</a:t>
+            </a:r>
+          </a:p>
+        </p:txBody>
+      </p:sp>
+      <p:pic>
+        <p:nvPicPr>
+          <p:cNvPr id="3" name="Picture 2"/>
+          <p:cNvPicPr>
+            <a:picLocks noChangeAspect="1"/>
+          </p:cNvPicPr>
+          <p:nvPr/>
+        </p:nvPicPr>
+        <p:blipFill>
+          <a:blip r:embed="rId3"/>
+          <a:stretch>
+            <a:fillRect/>
+          </a:stretch>
+        </p:blipFill>
+        <p:spPr>
+          <a:xfrm>
+            <a:off x="279400" y="1534845"/>
+            <a:ext cx="4795308" cy="3968096"/>
+          </a:xfrm>
+          <a:prstGeom prst="rect">
+            <a:avLst/>
+          </a:prstGeom>
+        </p:spPr>
+      </p:pic>
+      <p:sp>
+        <p:nvSpPr>
+          <p:cNvPr id="4" name="Rectangle 3"/>
+          <p:cNvSpPr/>
+          <p:nvPr/>
+        </p:nvSpPr>
+        <p:spPr>
+          <a:xfrm>
+            <a:off x="279400" y="5591095"/>
+            <a:ext cx="4644220" cy="369332"/>
+          </a:xfrm>
+          <a:prstGeom prst="rect">
+            <a:avLst/>
+          </a:prstGeom>
+        </p:spPr>
+        <p:txBody>
+          <a:bodyPr wrap="none">
+            <a:spAutoFit/>
+          </a:bodyPr>
+          <a:lstStyle/>
+          <a:p>
+            <a:r>
+              <a:rPr lang="en-US" dirty="0"/>
+              <a:t>https://hub.docker.com/r/cschranz/gpu-jupyter</a:t>
+            </a:r>
+          </a:p>
+        </p:txBody>
+      </p:sp>
+      <p:sp>
+        <p:nvSpPr>
+          <p:cNvPr id="9" name="Rectangle 8"/>
+          <p:cNvSpPr/>
+          <p:nvPr/>
+        </p:nvSpPr>
+        <p:spPr>
+          <a:xfrm>
+            <a:off x="279400" y="1142491"/>
+            <a:ext cx="2933175" cy="523220"/>
+          </a:xfrm>
+          <a:prstGeom prst="rect">
+            <a:avLst/>
+          </a:prstGeom>
+        </p:spPr>
+        <p:txBody>
+          <a:bodyPr wrap="none">
+            <a:spAutoFit/>
+          </a:bodyPr>
+          <a:lstStyle/>
+          <a:p>
+            <a:r>
+              <a:rPr lang="en-US" sz="2800" dirty="0" err="1" smtClean="0">
+                <a:solidFill>
+                  <a:srgbClr val="0070C0"/>
+                </a:solidFill>
+              </a:rPr>
+              <a:t>MultiGPUs-Jupyter</a:t>
+            </a:r>
+            <a:endParaRPr lang="en-US" sz="2800" dirty="0">
+              <a:solidFill>
+                <a:srgbClr val="0070C0"/>
+              </a:solidFill>
+            </a:endParaRPr>
+          </a:p>
+        </p:txBody>
+      </p:sp>
+      <p:pic>
+        <p:nvPicPr>
+          <p:cNvPr id="5" name="Picture 4"/>
+          <p:cNvPicPr>
+            <a:picLocks noChangeAspect="1"/>
+          </p:cNvPicPr>
+          <p:nvPr/>
+        </p:nvPicPr>
+        <p:blipFill>
+          <a:blip r:embed="rId4"/>
+          <a:stretch>
+            <a:fillRect/>
+          </a:stretch>
+        </p:blipFill>
+        <p:spPr>
+          <a:xfrm>
+            <a:off x="5636528" y="825697"/>
+            <a:ext cx="5033315" cy="3559765"/>
+          </a:xfrm>
+          <a:prstGeom prst="rect">
+            <a:avLst/>
+          </a:prstGeom>
+        </p:spPr>
+      </p:pic>
+      <p:sp>
+        <p:nvSpPr>
+          <p:cNvPr id="6" name="Rectangle 5"/>
+          <p:cNvSpPr/>
+          <p:nvPr/>
+        </p:nvSpPr>
+        <p:spPr>
+          <a:xfrm>
+            <a:off x="5636528" y="4155156"/>
+            <a:ext cx="6096000" cy="738664"/>
+          </a:xfrm>
+          <a:prstGeom prst="rect">
+            <a:avLst/>
+          </a:prstGeom>
+        </p:spPr>
+        <p:txBody>
+          <a:bodyPr>
+            <a:spAutoFit/>
+          </a:bodyPr>
+          <a:lstStyle/>
+          <a:p>
+            <a:r>
+              <a:rPr lang="en-US" sz="1200" dirty="0">
+                <a:solidFill>
+                  <a:schemeClr val="bg1">
+                    <a:lumMod val="85000"/>
+                  </a:schemeClr>
+                </a:solidFill>
+              </a:rPr>
+              <a:t>@Kin-Zhang </a:t>
+            </a:r>
+            <a:r>
+              <a:rPr lang="en-US" sz="1200" dirty="0" err="1">
+                <a:solidFill>
+                  <a:schemeClr val="bg1">
+                    <a:lumMod val="85000"/>
+                  </a:schemeClr>
+                </a:solidFill>
+              </a:rPr>
+              <a:t>Kin-Zhang</a:t>
+            </a:r>
+            <a:r>
+              <a:rPr lang="en-US" sz="1200" dirty="0">
+                <a:solidFill>
+                  <a:schemeClr val="bg1">
+                    <a:lumMod val="85000"/>
+                  </a:schemeClr>
+                </a:solidFill>
+              </a:rPr>
+              <a:t> mentioned this pull request on Apr </a:t>
+            </a:r>
+            <a:r>
+              <a:rPr lang="en-US" sz="1200" dirty="0" smtClean="0">
+                <a:solidFill>
+                  <a:schemeClr val="bg1">
+                    <a:lumMod val="85000"/>
+                  </a:schemeClr>
+                </a:solidFill>
+              </a:rPr>
+              <a:t>20</a:t>
+            </a:r>
+          </a:p>
+          <a:p>
+            <a:r>
+              <a:rPr lang="en-US" sz="1200" dirty="0">
+                <a:solidFill>
+                  <a:schemeClr val="bg1">
+                    <a:lumMod val="50000"/>
+                  </a:schemeClr>
+                </a:solidFill>
+              </a:rPr>
+              <a:t>https://github.com/lllyasviel/FramePack/pull/106</a:t>
+            </a:r>
+          </a:p>
+          <a:p>
+            <a:r>
+              <a:rPr lang="en-US" dirty="0"/>
+              <a:t>Multi GPUs in </a:t>
+            </a:r>
+            <a:r>
+              <a:rPr lang="en-US" dirty="0" err="1"/>
+              <a:t>docker</a:t>
+            </a:r>
+            <a:r>
+              <a:rPr lang="en-US" dirty="0"/>
+              <a:t> </a:t>
+            </a:r>
+            <a:r>
+              <a:rPr lang="en-US" dirty="0" err="1"/>
+              <a:t>nvidia</a:t>
+            </a:r>
+            <a:r>
+              <a:rPr lang="en-US" dirty="0"/>
+              <a:t> container #135</a:t>
+            </a:r>
+          </a:p>
+        </p:txBody>
+      </p:sp>
+      <p:sp>
+        <p:nvSpPr>
+          <p:cNvPr id="15" name="Rectangle 14"/>
+          <p:cNvSpPr/>
+          <p:nvPr/>
+        </p:nvSpPr>
+        <p:spPr>
+          <a:xfrm>
+            <a:off x="5636528" y="4893820"/>
+            <a:ext cx="5196423" cy="369332"/>
+          </a:xfrm>
+          <a:prstGeom prst="rect">
+            <a:avLst/>
+          </a:prstGeom>
+        </p:spPr>
+        <p:txBody>
+          <a:bodyPr wrap="none">
+            <a:spAutoFit/>
+          </a:bodyPr>
+          <a:lstStyle/>
+          <a:p>
+            <a:r>
+              <a:rPr lang="en-US" dirty="0"/>
+              <a:t>https://github.com/mmartial/ComfyUI-Nvidia-Docker</a:t>
+            </a:r>
+          </a:p>
+        </p:txBody>
+      </p:sp>
+    </p:spTree>
+    <p:extLst>
+      <p:ext uri="{BB962C8B-B14F-4D97-AF65-F5344CB8AC3E}">
+        <p14:creationId xmlns:p14="http://schemas.microsoft.com/office/powerpoint/2010/main" val="3558517141"/>
+      </p:ext>
+    </p:extLst>
+  </p:cSld>
+  <p:clrMapOvr>
+    <a:masterClrMapping/>
+  </p:clrMapOvr>
+  <p:timing>
+    <p:tnLst>
+      <p:par>
+        <p:cTn id="1" dur="indefinite" restart="never" nodeType="tmRoot"/>
+      </p:par>
+    </p:tnLst>
+  </p:timing>
+</p:sld>
+</file>
+
+<file path=ppt/slides/slide19.xml><?xml version="1.0" encoding="utf-8"?>
+<p:sld xmlns:a="http://schemas.openxmlformats.org/drawingml/2006/main" xmlns:r="http://schemas.openxmlformats.org/officeDocument/2006/relationships" xmlns:p="http://schemas.openxmlformats.org/presentationml/2006/main">
+  <p:cSld>
+    <p:spTree>
+      <p:nvGrpSpPr>
+        <p:cNvPr id="1" name=""/>
+        <p:cNvGrpSpPr/>
+        <p:nvPr/>
+      </p:nvGrpSpPr>
+      <p:grpSpPr>
+        <a:xfrm>
+          <a:off x="0" y="0"/>
+          <a:ext cx="0" cy="0"/>
+          <a:chOff x="0" y="0"/>
+          <a:chExt cx="0" cy="0"/>
+        </a:xfrm>
+      </p:grpSpPr>
+      <p:sp>
+        <p:nvSpPr>
+          <p:cNvPr id="2" name="Title 1"/>
+          <p:cNvSpPr>
+            <a:spLocks noGrp="1"/>
+          </p:cNvSpPr>
+          <p:nvPr>
+            <p:ph type="title"/>
+          </p:nvPr>
+        </p:nvSpPr>
         <p:spPr/>
         <p:txBody>
           <a:bodyPr/>
